--- a/lessons-v2/day15/day15.pptx
+++ b/lessons-v2/day15/day15.pptx
@@ -1330,8 +1330,10 @@
           <a:p>
             <a:r>
               <a:rPr lang="en-US" dirty="0"/>
-              <a:t>Walk each part ~3 min. Part A = today's exercise, done solo, written properly. Part B is the
-"understand the exploit, don't just run it" stretch. Emphasise: reproducible commands, captioned
+              <a:t>Walk each part ~3 min. The loop is the point: learn the attack, find it with a scanner, prove it,
+fix it, prove the fix. Part B reuses the Day 14 findings table (their homework). Part C: at least
+two proofs must come from the Hacksplaining five so the theory shows up in the lab. Part D is the
+defensive half -- do not let anyone skip it. Emphasise: reproducible commands, captioned
 evidence, and STAY IN SCOPE.</a:t>
             </a:r>
             <a:endParaRPr lang="en-US" dirty="0"/>
